--- a/Data_Science_Capstone_Presentation.pptx
+++ b/Data_Science_Capstone_Presentation.pptx
@@ -2571,6 +2571,60 @@
         </p:nvSpPr>
         <p:spPr>
           <a:xfrm>
+            <a:off x="731520" y="4709160"/>
+            <a:ext cx="10698480" cy="365760"/>
+          </a:xfrm>
+          <a:prstGeom prst="rect">
+            <a:avLst/>
+          </a:prstGeom>
+          <a:noFill/>
+          <a:ln/>
+        </p:spPr>
+        <p:txBody>
+          <a:bodyPr wrap="square" rtlCol="0" anchor="ctr"/>
+          <a:lstStyle/>
+          <a:p>
+            <a:pPr indent="0" marL="0">
+              <a:buNone/>
+            </a:pPr>
+            <a:r>
+              <a:rPr lang="en-US" sz="1400" dirty="0">
+                <a:solidFill>
+                  <a:srgbClr val="AAB4C8"/>
+                </a:solidFill>
+              </a:rPr>
+              <a:t>GitHub repository (all notebooks and Python files): </a:t>
+            </a:r>
+            <a:pPr indent="0" marL="0">
+              <a:buNone/>
+            </a:pPr>
+            <a:r>
+              <a:rPr lang="en-US" sz="1400" u="sng" dirty="0">
+                <a:solidFill>
+                  <a:srgbClr val="17BEBB"/>
+                </a:solidFill>
+                <a:hlinkClick r:id="rId1" invalidUrl="" action="" tgtFrame="" tooltip="" history="1" highlightClick="0" endSnd="0">
+                  <a:extLst>
+                    <a:ext uri="{A12FA001-AC4F-418D-AE19-62706E023703}">
+                      <ahyp:hlinkClr xmlns:ahyp="http://schemas.microsoft.com/office/drawing/2018/hyperlinkcolor" val="tx"/>
+                    </a:ext>
+                  </a:extLst>
+                </a:hlinkClick>
+              </a:rPr>
+              <a:t>https://github.com/razerblade09/spacex-falcon9-capstone</a:t>
+            </a:r>
+            <a:endParaRPr lang="en-US" sz="1400" dirty="0"/>
+          </a:p>
+        </p:txBody>
+      </p:sp>
+      <p:sp>
+        <p:nvSpPr>
+          <p:cNvPr id="5" name="Text 3"/>
+          <p:cNvSpPr/>
+          <p:nvPr/>
+        </p:nvSpPr>
+        <p:spPr>
+          <a:xfrm>
             <a:off x="731520" y="6035040"/>
             <a:ext cx="10058400" cy="365760"/>
           </a:xfrm>
@@ -2601,7 +2655,7 @@
       </p:sp>
       <p:sp>
         <p:nvSpPr>
-          <p:cNvPr id="5" name="Shape 3"/>
+          <p:cNvPr id="6" name="Shape 4"/>
           <p:cNvSpPr/>
           <p:nvPr/>
         </p:nvSpPr>

--- a/Data_Science_Capstone_Presentation.pptx
+++ b/Data_Science_Capstone_Presentation.pptx
@@ -2571,60 +2571,6 @@
         </p:nvSpPr>
         <p:spPr>
           <a:xfrm>
-            <a:off x="731520" y="4709160"/>
-            <a:ext cx="10698480" cy="365760"/>
-          </a:xfrm>
-          <a:prstGeom prst="rect">
-            <a:avLst/>
-          </a:prstGeom>
-          <a:noFill/>
-          <a:ln/>
-        </p:spPr>
-        <p:txBody>
-          <a:bodyPr wrap="square" rtlCol="0" anchor="ctr"/>
-          <a:lstStyle/>
-          <a:p>
-            <a:pPr indent="0" marL="0">
-              <a:buNone/>
-            </a:pPr>
-            <a:r>
-              <a:rPr lang="en-US" sz="1400" dirty="0">
-                <a:solidFill>
-                  <a:srgbClr val="AAB4C8"/>
-                </a:solidFill>
-              </a:rPr>
-              <a:t>GitHub repository (all notebooks and Python files): </a:t>
-            </a:r>
-            <a:pPr indent="0" marL="0">
-              <a:buNone/>
-            </a:pPr>
-            <a:r>
-              <a:rPr lang="en-US" sz="1400" u="sng" dirty="0">
-                <a:solidFill>
-                  <a:srgbClr val="17BEBB"/>
-                </a:solidFill>
-                <a:hlinkClick r:id="rId1" invalidUrl="" action="" tgtFrame="" tooltip="" history="1" highlightClick="0" endSnd="0">
-                  <a:extLst>
-                    <a:ext uri="{A12FA001-AC4F-418D-AE19-62706E023703}">
-                      <ahyp:hlinkClr xmlns:ahyp="http://schemas.microsoft.com/office/drawing/2018/hyperlinkcolor" val="tx"/>
-                    </a:ext>
-                  </a:extLst>
-                </a:hlinkClick>
-              </a:rPr>
-              <a:t>https://github.com/razerblade09/spacex-falcon9-capstone</a:t>
-            </a:r>
-            <a:endParaRPr lang="en-US" sz="1400" dirty="0"/>
-          </a:p>
-        </p:txBody>
-      </p:sp>
-      <p:sp>
-        <p:nvSpPr>
-          <p:cNvPr id="5" name="Text 3"/>
-          <p:cNvSpPr/>
-          <p:nvPr/>
-        </p:nvSpPr>
-        <p:spPr>
-          <a:xfrm>
             <a:off x="731520" y="6035040"/>
             <a:ext cx="10058400" cy="365760"/>
           </a:xfrm>
@@ -2655,7 +2601,7 @@
       </p:sp>
       <p:sp>
         <p:nvSpPr>
-          <p:cNvPr id="6" name="Shape 4"/>
+          <p:cNvPr id="5" name="Shape 3"/>
           <p:cNvSpPr/>
           <p:nvPr/>
         </p:nvSpPr>
